--- a/resources/Pretrain-Experiments-Illustration.pptx
+++ b/resources/Pretrain-Experiments-Illustration.pptx
@@ -3839,7 +3839,7 @@
                 </a:solidFill>
                 <a:latin typeface="Calibri"/>
               </a:rPr>
-              <a:t>OLMo-2</a:t>
+              <a:t>OLMo</a:t>
             </a:r>
           </a:p>
         </p:txBody>
